--- a/tests/fixtures/sample.pptx
+++ b/tests/fixtures/sample.pptx
@@ -59,6 +59,20 @@
           </a:p>
         </p:txBody>
       </p:sp>
+      <p:pic>
+        <p:nvPicPr>
+          <p:cNvPr id="10" name="Picture 1" descr="골든 슬라이드 그림"/>
+        </p:nvPicPr>
+        <p:blipFill>
+          <a:blip r:embed="rIdImg1"/>
+        </p:blipFill>
+        <p:spPr>
+          <a:xfrm>
+            <a:off x="0" y="0"/>
+            <a:ext cx="914400" cy="914400"/>
+          </a:xfrm>
+        </p:spPr>
+      </p:pic>
     </p:spTree>
   </p:cSld>
 </p:sld>
@@ -99,6 +113,65 @@
           </a:p>
         </p:txBody>
       </p:sp>
+      <p:graphicFrame>
+        <p:nvGraphicFramePr>
+          <p:cNvPr id="20" name="Table 1"/>
+        </p:nvGraphicFramePr>
+        <p:xfrm>
+          <a:off x="0" y="0"/>
+          <a:ext cx="1000000" cy="500000"/>
+        </p:xfrm>
+        <a:graphic>
+          <a:graphicData uri="http://schemas.openxmlformats.org/drawingml/2006/table">
+            <a:tbl>
+              <a:tblGrid>
+                <a:gridCol w="500000"/>
+                <a:gridCol w="500000"/>
+              </a:tblGrid>
+              <a:tr h="250000">
+                <a:tc>
+                  <a:txBody>
+                    <a:p>
+                      <a:r>
+                        <a:t>표 헤더 A</a:t>
+                      </a:r>
+                    </a:p>
+                  </a:txBody>
+                </a:tc>
+                <a:tc>
+                  <a:txBody>
+                    <a:p>
+                      <a:r>
+                        <a:t>표 헤더 B</a:t>
+                      </a:r>
+                    </a:p>
+                  </a:txBody>
+                </a:tc>
+              </a:tr>
+              <a:tr h="250000">
+                <a:tc>
+                  <a:txBody>
+                    <a:p>
+                      <a:r>
+                        <a:t>표 값 1</a:t>
+                      </a:r>
+                    </a:p>
+                  </a:txBody>
+                </a:tc>
+                <a:tc>
+                  <a:txBody>
+                    <a:p>
+                      <a:r>
+                        <a:t>표 값 2</a:t>
+                      </a:r>
+                    </a:p>
+                  </a:txBody>
+                </a:tc>
+              </a:tr>
+            </a:tbl>
+          </a:graphicData>
+        </a:graphic>
+      </p:graphicFrame>
     </p:spTree>
   </p:cSld>
 </p:sld>

--- a/tests/fixtures/sample.pptx
+++ b/tests/fixtures/sample.pptx
@@ -119,7 +119,7 @@
         </p:nvGraphicFramePr>
         <p:xfrm>
           <a:off x="0" y="0"/>
-          <a:ext cx="1000000" cy="500000"/>
+          <a:ext cx="1500000" cy="750000"/>
         </p:xfrm>
         <a:graphic>
           <a:graphicData uri="http://schemas.openxmlformats.org/drawingml/2006/table">
@@ -127,22 +127,28 @@
               <a:tblGrid>
                 <a:gridCol w="500000"/>
                 <a:gridCol w="500000"/>
+                <a:gridCol w="500000"/>
               </a:tblGrid>
               <a:tr h="250000">
-                <a:tc>
-                  <a:txBody>
-                    <a:p>
-                      <a:r>
-                        <a:t>표 헤더 A</a:t>
-                      </a:r>
-                    </a:p>
-                  </a:txBody>
-                </a:tc>
-                <a:tc>
-                  <a:txBody>
-                    <a:p>
-                      <a:r>
-                        <a:t>표 헤더 B</a:t>
+                <a:tc gridSpan="2">
+                  <a:txBody>
+                    <a:p>
+                      <a:r>
+                        <a:t>병합 헤더</a:t>
+                      </a:r>
+                    </a:p>
+                  </a:txBody>
+                </a:tc>
+                <a:tc hMerge="1">
+                  <a:txBody>
+                    <a:p/>
+                  </a:txBody>
+                </a:tc>
+                <a:tc>
+                  <a:txBody>
+                    <a:p>
+                      <a:r>
+                        <a:t>일반 헤더</a:t>
                       </a:r>
                     </a:p>
                   </a:txBody>
@@ -153,16 +159,50 @@
                   <a:txBody>
                     <a:p>
                       <a:r>
-                        <a:t>표 값 1</a:t>
-                      </a:r>
-                    </a:p>
-                  </a:txBody>
-                </a:tc>
-                <a:tc>
-                  <a:txBody>
-                    <a:p>
-                      <a:r>
-                        <a:t>표 값 2</a:t>
+                        <a:t>값1</a:t>
+                      </a:r>
+                    </a:p>
+                  </a:txBody>
+                </a:tc>
+                <a:tc rowSpan="2">
+                  <a:txBody>
+                    <a:p>
+                      <a:r>
+                        <a:t>세로병합값</a:t>
+                      </a:r>
+                    </a:p>
+                  </a:txBody>
+                </a:tc>
+                <a:tc>
+                  <a:txBody>
+                    <a:p>
+                      <a:r>
+                        <a:t>값2</a:t>
+                      </a:r>
+                    </a:p>
+                  </a:txBody>
+                </a:tc>
+              </a:tr>
+              <a:tr h="250000">
+                <a:tc>
+                  <a:txBody>
+                    <a:p>
+                      <a:r>
+                        <a:t>값3</a:t>
+                      </a:r>
+                    </a:p>
+                  </a:txBody>
+                </a:tc>
+                <a:tc vMerge="1">
+                  <a:txBody>
+                    <a:p/>
+                  </a:txBody>
+                </a:tc>
+                <a:tc>
+                  <a:txBody>
+                    <a:p>
+                      <a:r>
+                        <a:t>값4</a:t>
                       </a:r>
                     </a:p>
                   </a:txBody>
@@ -172,6 +212,24 @@
           </a:graphicData>
         </a:graphic>
       </p:graphicFrame>
+      <p:grpSp>
+        <p:nvGrpSpPr>
+          <p:cNvPr id="30" name="Group 1"/>
+        </p:nvGrpSpPr>
+        <p:grpSpPr/>
+        <p:sp>
+          <p:nvSpPr>
+            <p:nvPr/>
+          </p:nvSpPr>
+          <p:txBody>
+            <a:p>
+              <a:r>
+                <a:t>그룹 도형 안 텍스트 Gamma</a:t>
+              </a:r>
+            </a:p>
+          </p:txBody>
+        </p:sp>
+      </p:grpSp>
     </p:spTree>
   </p:cSld>
 </p:sld>

--- a/tests/fixtures/sample.pptx
+++ b/tests/fixtures/sample.pptx
@@ -6,6 +6,29 @@
     <p:sldId id="257" r:id="rId3"/>
   </p:sldIdLst>
 </p:presentation>
+</file>
+
+<file path=ppt/notesSlides/notesSlide1.xml><?xml version="1.0" encoding="utf-8"?>
+<p:notes xmlns:a="http://schemas.openxmlformats.org/drawingml/2006/main" xmlns:p="http://schemas.openxmlformats.org/presentationml/2006/main">
+  <p:cSld>
+    <p:spTree>
+      <p:sp>
+        <p:nvSpPr>
+          <p:nvPr>
+            <p:ph type="body" idx="1"/>
+          </p:nvPr>
+        </p:nvSpPr>
+        <p:txBody>
+          <a:p>
+            <a:r>
+              <a:t>골든 발표자 노트 확인용</a:t>
+            </a:r>
+          </a:p>
+        </p:txBody>
+      </p:sp>
+    </p:spTree>
+  </p:cSld>
+</p:notes>
 </file>
 
 <file path=ppt/slides/slide1.xml><?xml version="1.0" encoding="utf-8"?>
